--- a/dist/초2/기술·가정/재료와제작/초2_기술·가정_재료와제작_01_재료비교와도구안전_학생용.pptx
+++ b/dist/초2/기술·가정/재료와제작/초2_기술·가정_재료와제작_01_재료비교와도구안전_학생용.pptx
@@ -115,41 +115,41 @@
   <p:extLst>
     <p:ext uri="{521415D9-36F7-43E2-AB2F-B90AF26B5E84}">
       <p14:sectionLst xmlns:p14="http://schemas.microsoft.com/office/powerpoint/2010/main">
-        <p14:section name="도입" id="{8b9d8c9d-5011-e2b6-2140-179a103425b6}">
+        <p14:section name="도입" id="{3424795b-138c-9dff-66c7-eceed424e4eb}">
           <p14:sldIdLst>
             <p14:sldId id="256"/>
             <p14:sldId id="257"/>
           </p14:sldIdLst>
         </p14:section>
-        <p14:section name="개념" id="{dece3695-7f85-22d2-473d-4116bf5ede65}">
+        <p14:section name="개념" id="{25f5a21a-717c-3c3c-e729-e141b88d650d}">
           <p14:sldIdLst>
             <p14:sldId id="258"/>
             <p14:sldId id="260"/>
           </p14:sldIdLst>
         </p14:section>
-        <p14:section name="연습" id="{270b4401-f182-e07a-4947-490fddf8f4bf}">
+        <p14:section name="연습" id="{f3578672-a067-fb1c-5fc6-8ad98997a106}">
           <p14:sldIdLst>
             <p14:sldId id="259"/>
             <p14:sldId id="261"/>
           </p14:sldIdLst>
         </p14:section>
-        <p14:section name="개념" id="{bc623570-2523-3e9f-55f5-7c08e5acf800}">
+        <p14:section name="개념" id="{44ffeff9-6718-f360-927d-9d7e7384607a}">
           <p14:sldIdLst/>
         </p14:section>
-        <p14:section name="연습" id="{6a1fac04-d6fe-8675-d52d-b7d2c3151f0d}">
+        <p14:section name="연습" id="{beae4e5b-4d2c-c932-480d-adafbe7e6ec2}">
           <p14:sldIdLst/>
         </p14:section>
-        <p14:section name="확인" id="{de8ca691-3b70-381a-f003-83f239d7cb52}">
+        <p14:section name="확인" id="{9b6429d8-c8aa-18c4-42db-a0109b6d5519}">
           <p14:sldIdLst>
             <p14:sldId id="262"/>
           </p14:sldIdLst>
         </p14:section>
-        <p14:section name="정리" id="{450a71e4-f24b-3c51-67c5-73447e91384c}">
+        <p14:section name="정리" id="{c3eddaf1-d6fc-08b2-aa98-9d537bb5418b}">
           <p14:sldIdLst>
             <p14:sldId id="263"/>
           </p14:sldIdLst>
         </p14:section>
-        <p14:section name="보충" id="{36118549-b88d-8761-163a-8025c360802f}">
+        <p14:section name="보충" id="{cbca36bf-fb0a-fcc2-7638-f1ff7af78e43}">
           <p14:sldIdLst>
             <p14:sldId id="264"/>
           </p14:sldIdLst>

--- a/dist/초2/기술·가정/재료와제작/초2_기술·가정_재료와제작_01_재료비교와도구안전_학생용.pptx
+++ b/dist/초2/기술·가정/재료와제작/초2_기술·가정_재료와제작_01_재료비교와도구안전_학생용.pptx
@@ -115,41 +115,41 @@
   <p:extLst>
     <p:ext uri="{521415D9-36F7-43E2-AB2F-B90AF26B5E84}">
       <p14:sectionLst xmlns:p14="http://schemas.microsoft.com/office/powerpoint/2010/main">
-        <p14:section name="도입" id="{3424795b-138c-9dff-66c7-eceed424e4eb}">
+        <p14:section name="도입" id="{3ec64dfb-d23a-e428-428e-59e362b5dc5f}">
           <p14:sldIdLst>
             <p14:sldId id="256"/>
             <p14:sldId id="257"/>
           </p14:sldIdLst>
         </p14:section>
-        <p14:section name="개념" id="{25f5a21a-717c-3c3c-e729-e141b88d650d}">
+        <p14:section name="개념" id="{052bdc09-bfb8-294c-f76b-6c206602b0b8}">
           <p14:sldIdLst>
             <p14:sldId id="258"/>
             <p14:sldId id="260"/>
           </p14:sldIdLst>
         </p14:section>
-        <p14:section name="연습" id="{f3578672-a067-fb1c-5fc6-8ad98997a106}">
+        <p14:section name="연습" id="{f45af43a-38f0-86d8-7e1f-242945cc84c1}">
           <p14:sldIdLst>
             <p14:sldId id="259"/>
             <p14:sldId id="261"/>
           </p14:sldIdLst>
         </p14:section>
-        <p14:section name="개념" id="{44ffeff9-6718-f360-927d-9d7e7384607a}">
+        <p14:section name="개념" id="{60ec5588-ba8e-5cb1-54f9-c697c169590a}">
           <p14:sldIdLst/>
         </p14:section>
-        <p14:section name="연습" id="{beae4e5b-4d2c-c932-480d-adafbe7e6ec2}">
+        <p14:section name="연습" id="{ea63a9ce-3211-69c5-6618-72b72326736c}">
           <p14:sldIdLst/>
         </p14:section>
-        <p14:section name="확인" id="{9b6429d8-c8aa-18c4-42db-a0109b6d5519}">
+        <p14:section name="확인" id="{71dcc97f-4dc6-6053-53d5-1848c10bc6a7}">
           <p14:sldIdLst>
             <p14:sldId id="262"/>
           </p14:sldIdLst>
         </p14:section>
-        <p14:section name="정리" id="{c3eddaf1-d6fc-08b2-aa98-9d537bb5418b}">
+        <p14:section name="정리" id="{907888e5-9866-244b-ea94-bbfe10117d9a}">
           <p14:sldIdLst>
             <p14:sldId id="263"/>
           </p14:sldIdLst>
         </p14:section>
-        <p14:section name="보충" id="{cbca36bf-fb0a-fcc2-7638-f1ff7af78e43}">
+        <p14:section name="보충" id="{49447bf8-c5de-c6ea-8e0a-586e50853ef3}">
           <p14:sldIdLst>
             <p14:sldId id="264"/>
           </p14:sldIdLst>
